--- a/learning_and_plasticity/learning_and_plasticity_lecture_2_as_taught.pptx
+++ b/learning_and_plasticity/learning_and_plasticity_lecture_2_as_taught.pptx
@@ -5321,7 +5321,7 @@
                 </a:solidFill>
                 <a:latin typeface="Calibri"/>
               </a:rPr>
-              <a:t>Lecture 5.2 — Rules That Change a Weight</a:t>
+              <a:t>Lecture 5.2 — Algorithms for Changing Neural Weights</a:t>
             </a:r>
           </a:p>
         </p:txBody>
